--- a/Capstone_1/Ramirez_Sthefanie_SalesPresentation.pptx
+++ b/Capstone_1/Ramirez_Sthefanie_SalesPresentation.pptx
@@ -219,7 +219,7 @@
             <c:bubble3D val="0"/>
             <c:spPr>
               <a:solidFill>
-                <a:srgbClr val="ED7D31"/>
+                <a:schemeClr val="accent6"/>
               </a:solidFill>
               <a:effectLst/>
             </c:spPr>
@@ -515,7 +515,9 @@
             <c:bubble3D val="0"/>
             <c:spPr>
               <a:solidFill>
-                <a:srgbClr val="ED7D31"/>
+                <a:schemeClr val="accent6">
+                  <a:lumMod val="75000"/>
+                </a:schemeClr>
               </a:solidFill>
               <a:effectLst/>
             </c:spPr>
@@ -3987,7 +3989,13 @@
         <p:nvGraphicFramePr>
           <p:cNvPr id="24" name="Chart 0"/>
           <p:cNvGraphicFramePr/>
-          <p:nvPr/>
+          <p:nvPr>
+            <p:extLst>
+              <p:ext uri="{D42A27DB-BD31-4B8C-83A1-F6EECF244321}">
+                <p14:modId xmlns:p14="http://schemas.microsoft.com/office/powerpoint/2010/main" val="1317525743"/>
+              </p:ext>
+            </p:extLst>
+          </p:nvPr>
         </p:nvGraphicFramePr>
         <p:xfrm>
           <a:off x="274320" y="2468880"/>
@@ -4107,7 +4115,13 @@
         <p:nvGraphicFramePr>
           <p:cNvPr id="4" name="Chart 0"/>
           <p:cNvGraphicFramePr/>
-          <p:nvPr/>
+          <p:nvPr>
+            <p:extLst>
+              <p:ext uri="{D42A27DB-BD31-4B8C-83A1-F6EECF244321}">
+                <p14:modId xmlns:p14="http://schemas.microsoft.com/office/powerpoint/2010/main" val="3404416648"/>
+              </p:ext>
+            </p:extLst>
+          </p:nvPr>
         </p:nvGraphicFramePr>
         <p:xfrm>
           <a:off x="274320" y="731520"/>
@@ -4128,7 +4142,7 @@
           <p:nvPr>
             <p:extLst>
               <p:ext uri="{D42A27DB-BD31-4B8C-83A1-F6EECF244321}">
-                <p14:modId xmlns:p14="http://schemas.microsoft.com/office/powerpoint/2010/main" val="1579011935"/>
+                <p14:modId xmlns:p14="http://schemas.microsoft.com/office/powerpoint/2010/main" val="3835667306"/>
               </p:ext>
             </p:extLst>
           </p:nvPr>
@@ -5479,7 +5493,7 @@
                       <a:r>
                         <a:rPr lang="en-US" sz="1000" b="1" dirty="0">
                           <a:solidFill>
-                            <a:srgbClr val="ED7D31"/>
+                            <a:schemeClr val="accent6"/>
                           </a:solidFill>
                           <a:latin typeface="Arial" pitchFamily="34" charset="0"/>
                           <a:ea typeface="Arial" pitchFamily="34" charset="-122"/>
@@ -5488,6 +5502,9 @@
                         <a:t>▲ 62.4%</a:t>
                       </a:r>
                       <a:endParaRPr lang="en-US" sz="1000" dirty="0">
+                        <a:solidFill>
+                          <a:schemeClr val="accent6"/>
+                        </a:solidFill>
                         <a:latin typeface="Arial" charset="0"/>
                         <a:ea typeface="Arial" charset="0"/>
                         <a:cs typeface="Arial" charset="0"/>
@@ -5573,7 +5590,9 @@
             <a:r>
               <a:rPr lang="en-US" sz="1000" b="1" dirty="0">
                 <a:solidFill>
-                  <a:srgbClr val="ED7D31"/>
+                  <a:schemeClr val="accent6">
+                    <a:lumMod val="50000"/>
+                  </a:schemeClr>
                 </a:solidFill>
                 <a:latin typeface="Arial" pitchFamily="34" charset="0"/>
                 <a:ea typeface="Arial" pitchFamily="34" charset="-122"/>
@@ -5581,7 +5600,13 @@
               </a:rPr>
               <a:t>2025: +62.4% growth (+$930K)</a:t>
             </a:r>
-            <a:endParaRPr lang="en-US" sz="1000" dirty="0"/>
+            <a:endParaRPr lang="en-US" sz="1000" dirty="0">
+              <a:solidFill>
+                <a:schemeClr val="accent6">
+                  <a:lumMod val="50000"/>
+                </a:schemeClr>
+              </a:solidFill>
+            </a:endParaRPr>
           </a:p>
           <a:p>
             <a:pPr marL="0" indent="0" algn="ctr">
@@ -5590,7 +5615,9 @@
             <a:r>
               <a:rPr lang="en-US" sz="1000" b="1" dirty="0">
                 <a:solidFill>
-                  <a:srgbClr val="ED7D31"/>
+                  <a:schemeClr val="accent6">
+                    <a:lumMod val="50000"/>
+                  </a:schemeClr>
                 </a:solidFill>
                 <a:latin typeface="Arial" pitchFamily="34" charset="0"/>
                 <a:ea typeface="Arial" pitchFamily="34" charset="-122"/>
@@ -5598,7 +5625,13 @@
               </a:rPr>
               <a:t>Largest single-year increase in the period</a:t>
             </a:r>
-            <a:endParaRPr lang="en-US" sz="1000" dirty="0"/>
+            <a:endParaRPr lang="en-US" sz="1000" dirty="0">
+              <a:solidFill>
+                <a:schemeClr val="accent6">
+                  <a:lumMod val="50000"/>
+                </a:schemeClr>
+              </a:solidFill>
+            </a:endParaRPr>
           </a:p>
         </p:txBody>
       </p:sp>
@@ -8008,7 +8041,7 @@
           </a:solidFill>
           <a:ln w="12700">
             <a:solidFill>
-              <a:srgbClr val="2E75B6"/>
+              <a:schemeClr val="accent2"/>
             </a:solidFill>
             <a:prstDash val="solid"/>
           </a:ln>
@@ -8193,7 +8226,7 @@
           </a:solidFill>
           <a:ln w="12700">
             <a:solidFill>
-              <a:srgbClr val="ED7D31"/>
+              <a:schemeClr val="accent6"/>
             </a:solidFill>
             <a:prstDash val="solid"/>
           </a:ln>
@@ -8368,7 +8401,7 @@
         </p:nvSpPr>
         <p:spPr>
           <a:xfrm>
-            <a:off x="0" y="0"/>
+            <a:off x="-45720" y="-7620"/>
             <a:ext cx="9144000" cy="594360"/>
           </a:xfrm>
           <a:prstGeom prst="rect">
@@ -10276,21 +10309,21 @@
           <p:nvPr>
             <p:extLst>
               <p:ext uri="{D42A27DB-BD31-4B8C-83A1-F6EECF244321}">
-                <p14:modId xmlns:p14="http://schemas.microsoft.com/office/powerpoint/2010/main" val="2485776715"/>
+                <p14:modId xmlns:p14="http://schemas.microsoft.com/office/powerpoint/2010/main" val="3119415133"/>
               </p:ext>
             </p:extLst>
           </p:nvPr>
         </p:nvGraphicFramePr>
         <p:xfrm>
-          <a:off x="4709160" y="1402080"/>
-          <a:ext cx="4206240" cy="2941320"/>
+          <a:off x="4716780" y="1402080"/>
+          <a:ext cx="4198620" cy="2941320"/>
         </p:xfrm>
         <a:graphic>
           <a:graphicData uri="http://schemas.openxmlformats.org/drawingml/2006/table">
             <a:tbl>
               <a:tblPr/>
               <a:tblGrid>
-                <a:gridCol w="1143000">
+                <a:gridCol w="1135380">
                   <a:extLst>
                     <a:ext uri="{9D8B030D-6E8A-4147-A177-3AD203B41FA5}">
                       <a16:colId xmlns:a16="http://schemas.microsoft.com/office/drawing/2014/main" val="20000"/>
@@ -14839,7 +14872,7 @@
                 <a:ea typeface="Arial" pitchFamily="34" charset="-122"/>
                 <a:cs typeface="Arial" pitchFamily="34" charset="-120"/>
               </a:rPr>
-              <a:t>Top 2 stores consistently. Allocate more inventory, run local promotions, and staff up for Q1 back-to-school.</a:t>
+              <a:t>Top 2 stores consistently. Allocate more inventory, run local promotions, and staff up for Q1 back to school.</a:t>
             </a:r>
             <a:endParaRPr lang="en-US" sz="900" dirty="0"/>
           </a:p>
@@ -15201,7 +15234,7 @@
                 <a:ea typeface="Arial" pitchFamily="34" charset="-122"/>
                 <a:cs typeface="Arial" pitchFamily="34" charset="-120"/>
               </a:rPr>
-              <a:t>$1.78M in 2025. Prioritize IT restocking and upsell bundles across all 18 stores before semester starts.</a:t>
+              <a:t>Prioritize IT restocking and upsell bundles across all 18 stores before semester starts.</a:t>
             </a:r>
             <a:endParaRPr lang="en-US" sz="900" dirty="0"/>
           </a:p>
